--- a/assets/pptx/catalog-161.pptx
+++ b/assets/pptx/catalog-161.pptx
@@ -3266,7 +3266,7 @@
                 <a:ea typeface="Ebrima"/>
                 <a:cs typeface="Ebrima"/>
               </a:rPr>
-              <a:t>የተደረገው እርሱ የሚደረግ ነው አሃ (2x)</a:t>
+              <a:t>የተደረገው እርሱ የሚደረግ ነው አሃ 2x</a:t>
             </a:r>
           </a:p>
         </p:txBody>
@@ -3351,7 +3351,7 @@
                 <a:ea typeface="Ebrima"/>
                 <a:cs typeface="Ebrima"/>
               </a:rPr>
-              <a:t>እግዚአብሔር ብቻ አይለመድም (2x)</a:t>
+              <a:t>እግዚአብሔር ብቻ አይለመድም 2x</a:t>
             </a:r>
           </a:p>
         </p:txBody>
@@ -3629,7 +3629,7 @@
                 <a:ea typeface="Ebrima"/>
                 <a:cs typeface="Ebrima"/>
               </a:rPr>
-              <a:t>ይልቅ በጉብዝናው ወራት ጌታን ማሰብ ነው (2x)</a:t>
+              <a:t>ይልቅ በጉብዝናው ወራት ጌታን ማሰብ ነው 2x</a:t>
             </a:r>
           </a:p>
         </p:txBody>
@@ -4095,7 +4095,7 @@
                 <a:ea typeface="Ebrima"/>
                 <a:cs typeface="Ebrima"/>
               </a:rPr>
-              <a:t>ይልቅ በጉብዝናው ወራት ጌታን ማሰብ ነው (2x)</a:t>
+              <a:t>ይልቅ በጉብዝናው ወራት ጌታን ማሰብ ነው 2x</a:t>
             </a:r>
           </a:p>
         </p:txBody>
